--- a/AI-Cert-Trainer-Onepager.pptx
+++ b/AI-Cert-Trainer-Onepager.pptx
@@ -2393,7 +2393,7 @@
                 <a:ea typeface="Calibri" pitchFamily="34" charset="-122"/>
                 <a:cs typeface="Calibri" pitchFamily="34" charset="-120"/>
               </a:rPr>
-              <a:t>tinyurl.com/aicert730</a:t>
+              <a:t>tinyurl.com/msaicert</a:t>
             </a:r>
             <a:endParaRPr lang="en-US" sz="1100" dirty="0"/>
           </a:p>
